--- a/Dishu project.pptx
+++ b/Dishu project.pptx
@@ -237,7 +237,7 @@
           <a:p>
             <a:fld id="{11699836-02B7-459A-AF64-A000817D576C}" type="datetimeFigureOut">
               <a:rPr lang="en-IN" smtClean="0"/>
-              <a:t>14-03-2026</a:t>
+              <a:t>15-03-2026</a:t>
             </a:fld>
             <a:endParaRPr lang="en-IN"/>
           </a:p>
@@ -819,7 +819,7 @@
           <a:p>
             <a:fld id="{CB3FA99E-0146-4BD9-9E30-4EB71F3A4207}" type="datetimeFigureOut">
               <a:rPr lang="en-IN" smtClean="0"/>
-              <a:t>14-03-2026</a:t>
+              <a:t>15-03-2026</a:t>
             </a:fld>
             <a:endParaRPr lang="en-IN"/>
           </a:p>
@@ -909,7 +909,7 @@
           <a:p>
             <a:fld id="{4EDE50D6-574B-40AF-946F-D52A04ADE379}" type="datetime1">
               <a:rPr lang="en-US" smtClean="0"/>
-              <a:t>3/14/2026</a:t>
+              <a:t>3/15/2026</a:t>
             </a:fld>
             <a:endParaRPr lang="en-US"/>
           </a:p>
@@ -1102,7 +1102,7 @@
           <a:p>
             <a:fld id="{846CE7D5-CF57-46EF-B807-FDD0502418D4}" type="datetimeFigureOut">
               <a:rPr lang="en-GB" smtClean="0"/>
-              <a:t>14/03/2026</a:t>
+              <a:t>15/03/2026</a:t>
             </a:fld>
             <a:endParaRPr lang="en-GB"/>
           </a:p>
@@ -3652,8 +3652,8 @@
         </p:nvSpPr>
         <p:spPr>
           <a:xfrm>
-            <a:off x="-548" y="606335"/>
-            <a:ext cx="10515600" cy="785288"/>
+            <a:off x="-548" y="746449"/>
+            <a:ext cx="10515600" cy="645174"/>
           </a:xfrm>
         </p:spPr>
         <p:txBody>
@@ -3731,8 +3731,8 @@
         </p:nvSpPr>
         <p:spPr bwMode="auto">
           <a:xfrm>
-            <a:off x="279918" y="1306614"/>
-            <a:ext cx="11784564" cy="1138773"/>
+            <a:off x="279918" y="375590"/>
+            <a:ext cx="11784564" cy="3000821"/>
           </a:xfrm>
           <a:prstGeom prst="rect">
             <a:avLst/>
@@ -3788,6 +3788,58 @@
                 <a:spcPct val="0"/>
               </a:spcAft>
             </a:pPr>
+            <a:endParaRPr lang="en-IN" sz="1700" dirty="0">
+              <a:latin typeface="Bell MT" panose="02020503060305020303" pitchFamily="18" charset="0"/>
+            </a:endParaRPr>
+          </a:p>
+          <a:p>
+            <a:pPr lvl="0" eaLnBrk="0" fontAlgn="base" hangingPunct="0">
+              <a:spcBef>
+                <a:spcPct val="0"/>
+              </a:spcBef>
+              <a:spcAft>
+                <a:spcPct val="0"/>
+              </a:spcAft>
+            </a:pPr>
+            <a:endParaRPr lang="en-IN" sz="1700" dirty="0">
+              <a:latin typeface="Bell MT" panose="02020503060305020303" pitchFamily="18" charset="0"/>
+            </a:endParaRPr>
+          </a:p>
+          <a:p>
+            <a:pPr lvl="0" eaLnBrk="0" fontAlgn="base" hangingPunct="0">
+              <a:spcBef>
+                <a:spcPct val="0"/>
+              </a:spcBef>
+              <a:spcAft>
+                <a:spcPct val="0"/>
+              </a:spcAft>
+            </a:pPr>
+            <a:endParaRPr lang="en-IN" sz="1700" dirty="0">
+              <a:latin typeface="Bell MT" panose="02020503060305020303" pitchFamily="18" charset="0"/>
+            </a:endParaRPr>
+          </a:p>
+          <a:p>
+            <a:pPr lvl="0" eaLnBrk="0" fontAlgn="base" hangingPunct="0">
+              <a:spcBef>
+                <a:spcPct val="0"/>
+              </a:spcBef>
+              <a:spcAft>
+                <a:spcPct val="0"/>
+              </a:spcAft>
+            </a:pPr>
+            <a:endParaRPr lang="en-IN" sz="1700" dirty="0">
+              <a:latin typeface="Bell MT" panose="02020503060305020303" pitchFamily="18" charset="0"/>
+            </a:endParaRPr>
+          </a:p>
+          <a:p>
+            <a:pPr lvl="0" eaLnBrk="0" fontAlgn="base" hangingPunct="0">
+              <a:spcBef>
+                <a:spcPct val="0"/>
+              </a:spcBef>
+              <a:spcAft>
+                <a:spcPct val="0"/>
+              </a:spcAft>
+            </a:pPr>
             <a:r>
               <a:rPr lang="en-IN" sz="1700" dirty="0">
                 <a:latin typeface="Bell MT" panose="02020503060305020303" pitchFamily="18" charset="0"/>
@@ -3827,6 +3879,84 @@
               </a:rPr>
               <a:t>• Power BI Community Tutorials</a:t>
             </a:r>
+            <a:endParaRPr kumimoji="0" lang="en-IN" altLang="en-US" sz="1700" b="0" i="0" u="none" strike="noStrike" cap="none" normalizeH="0" baseline="0" dirty="0">
+              <a:ln>
+                <a:noFill/>
+              </a:ln>
+              <a:solidFill>
+                <a:schemeClr val="tx1"/>
+              </a:solidFill>
+              <a:effectLst/>
+              <a:latin typeface="Bell MT" panose="02020503060305020303" pitchFamily="18" charset="0"/>
+            </a:endParaRPr>
+          </a:p>
+          <a:p>
+            <a:pPr eaLnBrk="0" fontAlgn="base" hangingPunct="0">
+              <a:spcBef>
+                <a:spcPct val="0"/>
+              </a:spcBef>
+              <a:spcAft>
+                <a:spcPct val="0"/>
+              </a:spcAft>
+            </a:pPr>
+            <a:r>
+              <a:rPr lang="en-US" altLang="en-US" dirty="0">
+                <a:latin typeface="Bell MT" panose="02020503060305020303" pitchFamily="18" charset="0"/>
+              </a:rPr>
+              <a:t>Dataset: </a:t>
+            </a:r>
+            <a:r>
+              <a:rPr lang="en-IN" dirty="0">
+                <a:latin typeface="Bell MT" panose="02020503060305020303" pitchFamily="18" charset="0"/>
+                <a:hlinkClick r:id="rId2"/>
+              </a:rPr>
+              <a:t>SampleSuperstore.csv.xlsx</a:t>
+            </a:r>
+            <a:endParaRPr lang="en-IN" dirty="0">
+              <a:latin typeface="Bell MT" panose="02020503060305020303" pitchFamily="18" charset="0"/>
+            </a:endParaRPr>
+          </a:p>
+          <a:p>
+            <a:pPr eaLnBrk="0" fontAlgn="base" hangingPunct="0">
+              <a:spcBef>
+                <a:spcPct val="0"/>
+              </a:spcBef>
+              <a:spcAft>
+                <a:spcPct val="0"/>
+              </a:spcAft>
+            </a:pPr>
+            <a:r>
+              <a:rPr lang="en-IN" dirty="0" err="1">
+                <a:latin typeface="Bell MT" panose="02020503060305020303" pitchFamily="18" charset="0"/>
+              </a:rPr>
+              <a:t>Github</a:t>
+            </a:r>
+            <a:r>
+              <a:rPr lang="en-IN" dirty="0">
+                <a:latin typeface="Bell MT" panose="02020503060305020303" pitchFamily="18" charset="0"/>
+              </a:rPr>
+              <a:t> link : </a:t>
+            </a:r>
+            <a:r>
+              <a:rPr lang="en-IN" dirty="0">
+                <a:latin typeface="Bell MT" panose="02020503060305020303" pitchFamily="18" charset="0"/>
+                <a:hlinkClick r:id="rId3"/>
+              </a:rPr>
+              <a:t>https://github.com/dishu-13/E-Commerce-Sales-PowerBI-Dashboard.git</a:t>
+            </a:r>
+            <a:endParaRPr lang="en-IN" dirty="0">
+              <a:latin typeface="Bell MT" panose="02020503060305020303" pitchFamily="18" charset="0"/>
+            </a:endParaRPr>
+          </a:p>
+          <a:p>
+            <a:pPr lvl="0" eaLnBrk="0" fontAlgn="base" hangingPunct="0">
+              <a:spcBef>
+                <a:spcPct val="0"/>
+              </a:spcBef>
+              <a:spcAft>
+                <a:spcPct val="0"/>
+              </a:spcAft>
+            </a:pPr>
             <a:endParaRPr kumimoji="0" lang="en-US" altLang="en-US" sz="1700" b="0" i="0" u="none" strike="noStrike" cap="none" normalizeH="0" baseline="0" dirty="0">
               <a:ln>
                 <a:noFill/>
@@ -6001,6 +6131,33 @@
               </a:rPr>
               <a:t>The dashboard enables quick and effective business analysis.</a:t>
             </a:r>
+          </a:p>
+          <a:p>
+            <a:pPr lvl="1"/>
+            <a:endParaRPr lang="en-GB" sz="1700" dirty="0">
+              <a:latin typeface="Bell MT" panose="02020503060305020303" pitchFamily="18" charset="0"/>
+            </a:endParaRPr>
+          </a:p>
+          <a:p>
+            <a:pPr marL="457200" lvl="1" indent="0">
+              <a:buNone/>
+            </a:pPr>
+            <a:r>
+              <a:rPr lang="en-IN" sz="1800" b="1" dirty="0">
+                <a:latin typeface="Bell MT" panose="02020503060305020303" pitchFamily="18" charset="0"/>
+              </a:rPr>
+              <a:t>FINAL PROJECT LINK : </a:t>
+            </a:r>
+            <a:r>
+              <a:rPr lang="en-IN" sz="1800" dirty="0">
+                <a:latin typeface="Bell MT" panose="02020503060305020303" pitchFamily="18" charset="0"/>
+                <a:hlinkClick r:id="rId2"/>
+              </a:rPr>
+              <a:t>https://github.com/dishu-13/E-Commerce-Sales-PowerBI-Dashboard.git</a:t>
+            </a:r>
+            <a:endParaRPr lang="en-GB" sz="1700" dirty="0">
+              <a:latin typeface="Bell MT" panose="02020503060305020303" pitchFamily="18" charset="0"/>
+            </a:endParaRPr>
           </a:p>
         </p:txBody>
       </p:sp>
